--- a/assets/powerpoints/module-n2-classe/B2-un-crayon-rouge-une-feuille-blanche.pptx
+++ b/assets/powerpoints/module-n2-classe/B2-un-crayon-rouge-une-feuille-blanche.pptx
@@ -8822,7 +8822,25 @@
                 </a:solidFill>
                 <a:latin typeface="Verdana"/>
               </a:rPr>
-              <a:t>On dit « un crayon &lt;b&gt;rouge&lt;/b&gt; », jamais « un rouge crayon ». Beaucoup de langues font l'inverse : c'est l'erreur la plus fréquente du niveau, et elle disparaît vite quand on la nomme.</a:t>
+              <a:t>On dit « un crayon </a:t>
+            </a:r>
+            <a:r>
+              <a:rPr sz="2000" b="1" i="0">
+                <a:solidFill>
+                  <a:srgbClr val="4B4F52"/>
+                </a:solidFill>
+                <a:latin typeface="Verdana"/>
+              </a:rPr>
+              <a:t>rouge</a:t>
+            </a:r>
+            <a:r>
+              <a:rPr sz="2000" b="0" i="0">
+                <a:solidFill>
+                  <a:srgbClr val="4B4F52"/>
+                </a:solidFill>
+                <a:latin typeface="Verdana"/>
+              </a:rPr>
+              <a:t> », jamais « un rouge crayon ». Beaucoup de langues font l'inverse : c'est l'erreur la plus fréquente du niveau, et elle disparaît vite quand on la nomme.</a:t>
             </a:r>
           </a:p>
         </p:txBody>
@@ -9169,7 +9187,133 @@
                 </a:solidFill>
                 <a:latin typeface="Verdana"/>
               </a:rPr>
-              <a:t>Elles changent : vert / &lt;b&gt;verte&lt;/b&gt;, noir / &lt;b&gt;noire&lt;/b&gt;, blanc / &lt;b&gt;blanche&lt;/b&gt;. Elles ne changent pas : &lt;b&gt;rouge&lt;/b&gt;, &lt;b&gt;jaune&lt;/b&gt;. Au pluriel, tout prend un -s : deux crayons &lt;b&gt;bleus&lt;/b&gt;, trois feuilles &lt;b&gt;blanches&lt;/b&gt;.</a:t>
+              <a:t>Elles changent : vert / </a:t>
+            </a:r>
+            <a:r>
+              <a:rPr sz="2000" b="1" i="0">
+                <a:solidFill>
+                  <a:srgbClr val="4B4F52"/>
+                </a:solidFill>
+                <a:latin typeface="Verdana"/>
+              </a:rPr>
+              <a:t>verte</a:t>
+            </a:r>
+            <a:r>
+              <a:rPr sz="2000" b="0" i="0">
+                <a:solidFill>
+                  <a:srgbClr val="4B4F52"/>
+                </a:solidFill>
+                <a:latin typeface="Verdana"/>
+              </a:rPr>
+              <a:t>, noir / </a:t>
+            </a:r>
+            <a:r>
+              <a:rPr sz="2000" b="1" i="0">
+                <a:solidFill>
+                  <a:srgbClr val="4B4F52"/>
+                </a:solidFill>
+                <a:latin typeface="Verdana"/>
+              </a:rPr>
+              <a:t>noire</a:t>
+            </a:r>
+            <a:r>
+              <a:rPr sz="2000" b="0" i="0">
+                <a:solidFill>
+                  <a:srgbClr val="4B4F52"/>
+                </a:solidFill>
+                <a:latin typeface="Verdana"/>
+              </a:rPr>
+              <a:t>, blanc / </a:t>
+            </a:r>
+            <a:r>
+              <a:rPr sz="2000" b="1" i="0">
+                <a:solidFill>
+                  <a:srgbClr val="4B4F52"/>
+                </a:solidFill>
+                <a:latin typeface="Verdana"/>
+              </a:rPr>
+              <a:t>blanche</a:t>
+            </a:r>
+            <a:r>
+              <a:rPr sz="2000" b="0" i="0">
+                <a:solidFill>
+                  <a:srgbClr val="4B4F52"/>
+                </a:solidFill>
+                <a:latin typeface="Verdana"/>
+              </a:rPr>
+              <a:t>. Elles ne changent pas : </a:t>
+            </a:r>
+            <a:r>
+              <a:rPr sz="2000" b="1" i="0">
+                <a:solidFill>
+                  <a:srgbClr val="4B4F52"/>
+                </a:solidFill>
+                <a:latin typeface="Verdana"/>
+              </a:rPr>
+              <a:t>rouge</a:t>
+            </a:r>
+            <a:r>
+              <a:rPr sz="2000" b="0" i="0">
+                <a:solidFill>
+                  <a:srgbClr val="4B4F52"/>
+                </a:solidFill>
+                <a:latin typeface="Verdana"/>
+              </a:rPr>
+              <a:t>, </a:t>
+            </a:r>
+            <a:r>
+              <a:rPr sz="2000" b="1" i="0">
+                <a:solidFill>
+                  <a:srgbClr val="4B4F52"/>
+                </a:solidFill>
+                <a:latin typeface="Verdana"/>
+              </a:rPr>
+              <a:t>jaune</a:t>
+            </a:r>
+            <a:r>
+              <a:rPr sz="2000" b="0" i="0">
+                <a:solidFill>
+                  <a:srgbClr val="4B4F52"/>
+                </a:solidFill>
+                <a:latin typeface="Verdana"/>
+              </a:rPr>
+              <a:t>. Au pluriel, tout prend un -s : deux crayons </a:t>
+            </a:r>
+            <a:r>
+              <a:rPr sz="2000" b="1" i="0">
+                <a:solidFill>
+                  <a:srgbClr val="4B4F52"/>
+                </a:solidFill>
+                <a:latin typeface="Verdana"/>
+              </a:rPr>
+              <a:t>bleus</a:t>
+            </a:r>
+            <a:r>
+              <a:rPr sz="2000" b="0" i="0">
+                <a:solidFill>
+                  <a:srgbClr val="4B4F52"/>
+                </a:solidFill>
+                <a:latin typeface="Verdana"/>
+              </a:rPr>
+              <a:t>, trois feuilles </a:t>
+            </a:r>
+            <a:r>
+              <a:rPr sz="2000" b="1" i="0">
+                <a:solidFill>
+                  <a:srgbClr val="4B4F52"/>
+                </a:solidFill>
+                <a:latin typeface="Verdana"/>
+              </a:rPr>
+              <a:t>blanches</a:t>
+            </a:r>
+            <a:r>
+              <a:rPr sz="2000" b="0" i="0">
+                <a:solidFill>
+                  <a:srgbClr val="4B4F52"/>
+                </a:solidFill>
+                <a:latin typeface="Verdana"/>
+              </a:rPr>
+              <a:t>.</a:t>
             </a:r>
           </a:p>
         </p:txBody>
